--- a/sunum/Proje_Sunumu.pptx
+++ b/sunum/Proje_Sunumu.pptx
@@ -5,7 +5,7 @@
     <p:sldMasterId id="2147483648" r:id="rId1"/>
   </p:sldMasterIdLst>
   <p:notesMasterIdLst>
-    <p:notesMasterId r:id="rId12"/>
+    <p:notesMasterId r:id="rId13"/>
   </p:notesMasterIdLst>
   <p:sldIdLst>
     <p:sldId id="256" r:id="rId2"/>
@@ -18,6 +18,7 @@
     <p:sldId id="263" r:id="rId9"/>
     <p:sldId id="264" r:id="rId10"/>
     <p:sldId id="265" r:id="rId11"/>
+    <p:sldId id="266" r:id="rId12"/>
   </p:sldIdLst>
   <p:sldSz cx="12192000" cy="6858000"/>
   <p:notesSz cx="6858000" cy="12192000"/>
@@ -405,6 +406,114 @@
     <p:extLst>
       <p:ext uri="{BB962C8B-B14F-4D97-AF65-F5344CB8AC3E}">
         <p14:creationId xmlns:p14="http://schemas.microsoft.com/office/powerpoint/2010/main" val="1024086991"/>
+      </p:ext>
+    </p:extLst>
+  </p:cSld>
+  <p:clrMapOvr>
+    <a:masterClrMapping/>
+  </p:clrMapOvr>
+</p:notes>
+</file>
+
+<file path=ppt/notesSlides/notesSlide11.xml><?xml version="1.0" encoding="utf-8"?>
+<p:notes xmlns:a="http://schemas.openxmlformats.org/drawingml/2006/main" xmlns:r="http://schemas.openxmlformats.org/officeDocument/2006/relationships" xmlns:p="http://schemas.openxmlformats.org/presentationml/2006/main">
+  <p:cSld>
+    <p:spTree>
+      <p:nvGrpSpPr>
+        <p:cNvPr id="1" name="">
+          <a:extLst>
+            <a:ext uri="{FF2B5EF4-FFF2-40B4-BE49-F238E27FC236}">
+              <a16:creationId xmlns:a16="http://schemas.microsoft.com/office/drawing/2014/main" id="{F4617F3D-D2DA-9004-6E51-8E9B90F9BC90}"/>
+            </a:ext>
+          </a:extLst>
+        </p:cNvPr>
+        <p:cNvGrpSpPr/>
+        <p:nvPr/>
+      </p:nvGrpSpPr>
+      <p:grpSpPr>
+        <a:xfrm>
+          <a:off x="0" y="0"/>
+          <a:ext cx="0" cy="0"/>
+          <a:chOff x="0" y="0"/>
+          <a:chExt cx="0" cy="0"/>
+        </a:xfrm>
+      </p:grpSpPr>
+      <p:sp>
+        <p:nvSpPr>
+          <p:cNvPr id="2" name="Slide Image Placeholder 1">
+            <a:extLst>
+              <a:ext uri="{FF2B5EF4-FFF2-40B4-BE49-F238E27FC236}">
+                <a16:creationId xmlns:a16="http://schemas.microsoft.com/office/drawing/2014/main" id="{B8EDFA52-EB4A-8009-56E3-54611ADAB63D}"/>
+              </a:ext>
+            </a:extLst>
+          </p:cNvPr>
+          <p:cNvSpPr>
+            <a:spLocks noGrp="1" noRot="1" noChangeAspect="1"/>
+          </p:cNvSpPr>
+          <p:nvPr>
+            <p:ph type="sldImg"/>
+          </p:nvPr>
+        </p:nvSpPr>
+        <p:spPr/>
+      </p:sp>
+      <p:sp>
+        <p:nvSpPr>
+          <p:cNvPr id="3" name="Notes Placeholder 2">
+            <a:extLst>
+              <a:ext uri="{FF2B5EF4-FFF2-40B4-BE49-F238E27FC236}">
+                <a16:creationId xmlns:a16="http://schemas.microsoft.com/office/drawing/2014/main" id="{9EA8CCBD-2127-465F-FC50-BB96F04297C8}"/>
+              </a:ext>
+            </a:extLst>
+          </p:cNvPr>
+          <p:cNvSpPr>
+            <a:spLocks noGrp="1"/>
+          </p:cNvSpPr>
+          <p:nvPr>
+            <p:ph type="body" idx="1"/>
+          </p:nvPr>
+        </p:nvSpPr>
+        <p:spPr/>
+        <p:txBody>
+          <a:bodyPr/>
+          <a:lstStyle/>
+          <a:p>
+            <a:endParaRPr lang="en-US" dirty="0"/>
+          </a:p>
+        </p:txBody>
+      </p:sp>
+      <p:sp>
+        <p:nvSpPr>
+          <p:cNvPr id="4" name="Slide Number Placeholder 3">
+            <a:extLst>
+              <a:ext uri="{FF2B5EF4-FFF2-40B4-BE49-F238E27FC236}">
+                <a16:creationId xmlns:a16="http://schemas.microsoft.com/office/drawing/2014/main" id="{6C9B0CEF-8BE7-C3A1-ADC5-58EC97803ACC}"/>
+              </a:ext>
+            </a:extLst>
+          </p:cNvPr>
+          <p:cNvSpPr>
+            <a:spLocks noGrp="1"/>
+          </p:cNvSpPr>
+          <p:nvPr>
+            <p:ph type="sldNum" sz="quarter" idx="10"/>
+          </p:nvPr>
+        </p:nvSpPr>
+        <p:spPr/>
+        <p:txBody>
+          <a:bodyPr/>
+          <a:lstStyle/>
+          <a:p>
+            <a:fld id="{F7021451-1387-4CA6-816F-3879F97B5CBC}" type="slidenum">
+              <a:rPr lang="en-US"/>
+              <a:t>11</a:t>
+            </a:fld>
+            <a:endParaRPr lang="en-US"/>
+          </a:p>
+        </p:txBody>
+      </p:sp>
+    </p:spTree>
+    <p:extLst>
+      <p:ext uri="{BB962C8B-B14F-4D97-AF65-F5344CB8AC3E}">
+        <p14:creationId xmlns:p14="http://schemas.microsoft.com/office/powerpoint/2010/main" val="377085683"/>
       </p:ext>
     </p:extLst>
   </p:cSld>
@@ -1974,7 +2083,73 @@
                 <a:ea typeface="Georgia" pitchFamily="34" charset="-122"/>
                 <a:cs typeface="Georgia" pitchFamily="34" charset="-120"/>
               </a:rPr>
-              <a:t>Sonuc ve Degerlendirme</a:t>
+              <a:t>Sonu</a:t>
+            </a:r>
+            <a:r>
+              <a:rPr lang="tr-TR" sz="3400" b="1" dirty="0">
+                <a:solidFill>
+                  <a:srgbClr val="F2E8DC"/>
+                </a:solidFill>
+                <a:latin typeface="Georgia" pitchFamily="34" charset="0"/>
+                <a:ea typeface="Georgia" pitchFamily="34" charset="-122"/>
+                <a:cs typeface="Georgia" pitchFamily="34" charset="-120"/>
+              </a:rPr>
+              <a:t>ç</a:t>
+            </a:r>
+            <a:r>
+              <a:rPr lang="en-US" sz="3400" b="1" dirty="0">
+                <a:solidFill>
+                  <a:srgbClr val="F2E8DC"/>
+                </a:solidFill>
+                <a:latin typeface="Georgia" pitchFamily="34" charset="0"/>
+                <a:ea typeface="Georgia" pitchFamily="34" charset="-122"/>
+                <a:cs typeface="Georgia" pitchFamily="34" charset="-120"/>
+              </a:rPr>
+              <a:t> </a:t>
+            </a:r>
+            <a:r>
+              <a:rPr lang="en-US" sz="3400" b="1" dirty="0" err="1">
+                <a:solidFill>
+                  <a:srgbClr val="F2E8DC"/>
+                </a:solidFill>
+                <a:latin typeface="Georgia" pitchFamily="34" charset="0"/>
+                <a:ea typeface="Georgia" pitchFamily="34" charset="-122"/>
+                <a:cs typeface="Georgia" pitchFamily="34" charset="-120"/>
+              </a:rPr>
+              <a:t>ve</a:t>
+            </a:r>
+            <a:r>
+              <a:rPr lang="en-US" sz="3400" b="1" dirty="0">
+                <a:solidFill>
+                  <a:srgbClr val="F2E8DC"/>
+                </a:solidFill>
+                <a:latin typeface="Georgia" pitchFamily="34" charset="0"/>
+                <a:ea typeface="Georgia" pitchFamily="34" charset="-122"/>
+                <a:cs typeface="Georgia" pitchFamily="34" charset="-120"/>
+              </a:rPr>
+              <a:t> De</a:t>
+            </a:r>
+            <a:r>
+              <a:rPr lang="tr-TR" sz="3400" b="1" dirty="0">
+                <a:solidFill>
+                  <a:srgbClr val="F2E8DC"/>
+                </a:solidFill>
+                <a:latin typeface="Georgia" pitchFamily="34" charset="0"/>
+                <a:ea typeface="Georgia" pitchFamily="34" charset="-122"/>
+                <a:cs typeface="Georgia" pitchFamily="34" charset="-120"/>
+              </a:rPr>
+              <a:t>ğ</a:t>
+            </a:r>
+            <a:r>
+              <a:rPr lang="en-US" sz="3400" b="1" dirty="0" err="1">
+                <a:solidFill>
+                  <a:srgbClr val="F2E8DC"/>
+                </a:solidFill>
+                <a:latin typeface="Georgia" pitchFamily="34" charset="0"/>
+                <a:ea typeface="Georgia" pitchFamily="34" charset="-122"/>
+                <a:cs typeface="Georgia" pitchFamily="34" charset="-120"/>
+              </a:rPr>
+              <a:t>erlendirme</a:t>
             </a:r>
             <a:endParaRPr lang="en-US" sz="3400" dirty="0"/>
           </a:p>
@@ -3463,6 +3638,174 @@
         </p:txBody>
       </p:sp>
     </p:spTree>
+  </p:cSld>
+  <p:clrMapOvr>
+    <a:masterClrMapping/>
+  </p:clrMapOvr>
+</p:sld>
+</file>
+
+<file path=ppt/slides/slide11.xml><?xml version="1.0" encoding="utf-8"?>
+<p:sld xmlns:a="http://schemas.openxmlformats.org/drawingml/2006/main" xmlns:r="http://schemas.openxmlformats.org/officeDocument/2006/relationships" xmlns:p="http://schemas.openxmlformats.org/presentationml/2006/main">
+  <p:cSld>
+    <p:bg>
+      <p:bgPr>
+        <a:solidFill>
+          <a:srgbClr val="8B2E3C"/>
+        </a:solidFill>
+        <a:effectLst/>
+      </p:bgPr>
+    </p:bg>
+    <p:spTree>
+      <p:nvGrpSpPr>
+        <p:cNvPr id="1" name="">
+          <a:extLst>
+            <a:ext uri="{FF2B5EF4-FFF2-40B4-BE49-F238E27FC236}">
+              <a16:creationId xmlns:a16="http://schemas.microsoft.com/office/drawing/2014/main" id="{9CF7720F-FDF5-5A8E-F1C3-75FA96591263}"/>
+            </a:ext>
+          </a:extLst>
+        </p:cNvPr>
+        <p:cNvGrpSpPr/>
+        <p:nvPr/>
+      </p:nvGrpSpPr>
+      <p:grpSpPr>
+        <a:xfrm>
+          <a:off x="0" y="0"/>
+          <a:ext cx="0" cy="0"/>
+          <a:chOff x="0" y="0"/>
+          <a:chExt cx="0" cy="0"/>
+        </a:xfrm>
+      </p:grpSpPr>
+      <p:sp>
+        <p:nvSpPr>
+          <p:cNvPr id="2" name="Shape 0">
+            <a:extLst>
+              <a:ext uri="{FF2B5EF4-FFF2-40B4-BE49-F238E27FC236}">
+                <a16:creationId xmlns:a16="http://schemas.microsoft.com/office/drawing/2014/main" id="{0FB66E09-50FD-876E-CEE3-4C76CCAE73BF}"/>
+              </a:ext>
+            </a:extLst>
+          </p:cNvPr>
+          <p:cNvSpPr>
+            <a:spLocks noGrp="1" noRot="1" noMove="1" noResize="1" noEditPoints="1" noAdjustHandles="1" noChangeArrowheads="1" noChangeShapeType="1"/>
+          </p:cNvSpPr>
+          <p:nvPr/>
+        </p:nvSpPr>
+        <p:spPr>
+          <a:xfrm>
+            <a:off x="320040" y="320040"/>
+            <a:ext cx="11548872" cy="6217920"/>
+          </a:xfrm>
+          <a:prstGeom prst="rect">
+            <a:avLst/>
+          </a:prstGeom>
+          <a:solidFill>
+            <a:srgbClr val="8B2E3C"/>
+          </a:solidFill>
+          <a:ln w="12700">
+            <a:solidFill>
+              <a:srgbClr val="F2E8DC"/>
+            </a:solidFill>
+            <a:prstDash val="solid"/>
+          </a:ln>
+        </p:spPr>
+        <p:txBody>
+          <a:bodyPr/>
+          <a:lstStyle/>
+          <a:p>
+            <a:endParaRPr lang="tr-TR" dirty="0"/>
+          </a:p>
+        </p:txBody>
+      </p:sp>
+      <p:sp>
+        <p:nvSpPr>
+          <p:cNvPr id="21" name="Text 1">
+            <a:extLst>
+              <a:ext uri="{FF2B5EF4-FFF2-40B4-BE49-F238E27FC236}">
+                <a16:creationId xmlns:a16="http://schemas.microsoft.com/office/drawing/2014/main" id="{6037F200-17E9-E373-458C-1EE336B897B9}"/>
+              </a:ext>
+            </a:extLst>
+          </p:cNvPr>
+          <p:cNvSpPr/>
+          <p:nvPr/>
+        </p:nvSpPr>
+        <p:spPr>
+          <a:xfrm>
+            <a:off x="829559" y="2114110"/>
+            <a:ext cx="10332720" cy="777240"/>
+          </a:xfrm>
+          <a:prstGeom prst="rect">
+            <a:avLst/>
+          </a:prstGeom>
+          <a:noFill/>
+          <a:ln/>
+        </p:spPr>
+        <p:txBody>
+          <a:bodyPr wrap="square" rtlCol="0" anchor="ctr"/>
+          <a:lstStyle/>
+          <a:p>
+            <a:pPr marL="0" indent="0" algn="ctr">
+              <a:buNone/>
+            </a:pPr>
+            <a:r>
+              <a:rPr lang="tr-TR" sz="3400" b="1" dirty="0">
+                <a:solidFill>
+                  <a:srgbClr val="F2E8DC"/>
+                </a:solidFill>
+                <a:latin typeface="Georgia" pitchFamily="34" charset="0"/>
+                <a:ea typeface="Georgia" pitchFamily="34" charset="-122"/>
+                <a:cs typeface="Georgia" pitchFamily="34" charset="-120"/>
+              </a:rPr>
+              <a:t>Proje Açık Kaynak Linki</a:t>
+            </a:r>
+            <a:endParaRPr lang="en-US" sz="3400" dirty="0"/>
+          </a:p>
+        </p:txBody>
+      </p:sp>
+      <p:sp>
+        <p:nvSpPr>
+          <p:cNvPr id="22" name="Metin kutusu 21">
+            <a:extLst>
+              <a:ext uri="{FF2B5EF4-FFF2-40B4-BE49-F238E27FC236}">
+                <a16:creationId xmlns:a16="http://schemas.microsoft.com/office/drawing/2014/main" id="{5F9F2662-50D2-DBE9-1805-B782512099AE}"/>
+              </a:ext>
+            </a:extLst>
+          </p:cNvPr>
+          <p:cNvSpPr txBox="1"/>
+          <p:nvPr/>
+        </p:nvSpPr>
+        <p:spPr>
+          <a:xfrm>
+            <a:off x="3173408" y="3429000"/>
+            <a:ext cx="5645021" cy="369332"/>
+          </a:xfrm>
+          <a:prstGeom prst="rect">
+            <a:avLst/>
+          </a:prstGeom>
+          <a:noFill/>
+        </p:spPr>
+        <p:txBody>
+          <a:bodyPr wrap="square" rtlCol="0">
+            <a:spAutoFit/>
+          </a:bodyPr>
+          <a:lstStyle/>
+          <a:p>
+            <a:r>
+              <a:rPr lang="tr-TR" dirty="0">
+                <a:solidFill>
+                  <a:srgbClr val="F2E8DC"/>
+                </a:solidFill>
+              </a:rPr>
+              <a:t>https://github.com/Burak-Kosar/MakineOgrenmesiProjesi</a:t>
+            </a:r>
+          </a:p>
+        </p:txBody>
+      </p:sp>
+    </p:spTree>
+    <p:extLst>
+      <p:ext uri="{BB962C8B-B14F-4D97-AF65-F5344CB8AC3E}">
+        <p14:creationId xmlns:p14="http://schemas.microsoft.com/office/powerpoint/2010/main" val="3886582536"/>
+      </p:ext>
+    </p:extLst>
   </p:cSld>
   <p:clrMapOvr>
     <a:masterClrMapping/>
